--- a/presentations/aws-frontier-agents-common-architecture-presentation.pptx
+++ b/presentations/aws-frontier-agents-common-architecture-presentation.pptx
@@ -12012,7 +12012,7 @@
         <p:spPr>
           <a:xfrm>
             <a:off x="502920" y="2295144"/>
-            <a:ext cx="11183112" cy="795528"/>
+            <a:ext cx="11183112" cy="969264"/>
           </a:xfrm>
           <a:prstGeom prst="roundRect">
             <a:avLst>
@@ -12056,8 +12056,8 @@
         </p:nvSpPr>
         <p:spPr>
           <a:xfrm>
-            <a:off x="704088" y="2450592"/>
-            <a:ext cx="10789920" cy="475488"/>
+            <a:off x="704088" y="2432304"/>
+            <a:ext cx="10789920" cy="713232"/>
           </a:xfrm>
           <a:prstGeom prst="rect">
             <a:avLst/>
@@ -12077,7 +12077,7 @@
               <a:spcAft>
                 <a:spcPts val="300"/>
               </a:spcAft>
-              <a:defRPr sz="1400" b="0">
+              <a:defRPr sz="1500" b="0">
                 <a:solidFill>
                   <a:srgbClr val="FFFFFF"/>
                 </a:solidFill>
@@ -12098,7 +12098,7 @@
         </p:nvSpPr>
         <p:spPr>
           <a:xfrm>
-            <a:off x="502920" y="3264408"/>
+            <a:off x="502920" y="3429000"/>
             <a:ext cx="3200400" cy="201168"/>
           </a:xfrm>
           <a:prstGeom prst="rect">
@@ -12140,7 +12140,7 @@
         </p:nvSpPr>
         <p:spPr>
           <a:xfrm>
-            <a:off x="502920" y="3520439"/>
+            <a:off x="502920" y="3685032"/>
             <a:ext cx="3337560" cy="612648"/>
           </a:xfrm>
           <a:prstGeom prst="rect">
@@ -12182,7 +12182,7 @@
         </p:nvSpPr>
         <p:spPr>
           <a:xfrm>
-            <a:off x="502920" y="4224528"/>
+            <a:off x="502920" y="4389120"/>
             <a:ext cx="3200400" cy="201168"/>
           </a:xfrm>
           <a:prstGeom prst="rect">
@@ -12224,7 +12224,7 @@
         </p:nvSpPr>
         <p:spPr>
           <a:xfrm>
-            <a:off x="502920" y="4480560"/>
+            <a:off x="502920" y="4645152"/>
             <a:ext cx="3337560" cy="612648"/>
           </a:xfrm>
           <a:prstGeom prst="rect">
@@ -12266,7 +12266,7 @@
         </p:nvSpPr>
         <p:spPr>
           <a:xfrm>
-            <a:off x="502920" y="5184648"/>
+            <a:off x="502920" y="5349240"/>
             <a:ext cx="3200400" cy="201168"/>
           </a:xfrm>
           <a:prstGeom prst="rect">
@@ -12308,7 +12308,7 @@
         </p:nvSpPr>
         <p:spPr>
           <a:xfrm>
-            <a:off x="502920" y="5440680"/>
+            <a:off x="502920" y="5605272"/>
             <a:ext cx="3337560" cy="612648"/>
           </a:xfrm>
           <a:prstGeom prst="rect">
@@ -12350,8 +12350,8 @@
         </p:nvSpPr>
         <p:spPr>
           <a:xfrm>
-            <a:off x="4096512" y="3246120"/>
-            <a:ext cx="7589520" cy="534009"/>
+            <a:off x="4096512" y="3410712"/>
+            <a:ext cx="7589520" cy="501091"/>
           </a:xfrm>
           <a:prstGeom prst="roundRect">
             <a:avLst>
@@ -12395,7 +12395,7 @@
         </p:nvSpPr>
         <p:spPr>
           <a:xfrm>
-            <a:off x="4233672" y="3355848"/>
+            <a:off x="4233672" y="3520440"/>
             <a:ext cx="594360" cy="256032"/>
           </a:xfrm>
           <a:prstGeom prst="rect">
@@ -12437,7 +12437,7 @@
         </p:nvSpPr>
         <p:spPr>
           <a:xfrm>
-            <a:off x="4937760" y="3319272"/>
+            <a:off x="4937760" y="3483864"/>
             <a:ext cx="6537960" cy="219456"/>
           </a:xfrm>
           <a:prstGeom prst="rect">
@@ -12479,8 +12479,8 @@
         </p:nvSpPr>
         <p:spPr>
           <a:xfrm>
-            <a:off x="4937760" y="3557015"/>
-            <a:ext cx="6537960" cy="232257"/>
+            <a:off x="4937760" y="3685032"/>
+            <a:ext cx="6537960" cy="263347"/>
           </a:xfrm>
           <a:prstGeom prst="rect">
             <a:avLst/>
@@ -12500,7 +12500,7 @@
               <a:spcAft>
                 <a:spcPts val="300"/>
               </a:spcAft>
-              <a:defRPr sz="1400" b="0">
+              <a:defRPr sz="1350" b="0">
                 <a:solidFill>
                   <a:srgbClr val="182B43"/>
                 </a:solidFill>
@@ -12521,8 +12521,8 @@
         </p:nvSpPr>
         <p:spPr>
           <a:xfrm>
-            <a:off x="4096512" y="3834993"/>
-            <a:ext cx="7589520" cy="534009"/>
+            <a:off x="4096512" y="3966667"/>
+            <a:ext cx="7589520" cy="501091"/>
           </a:xfrm>
           <a:prstGeom prst="roundRect">
             <a:avLst>
@@ -12566,7 +12566,7 @@
         </p:nvSpPr>
         <p:spPr>
           <a:xfrm>
-            <a:off x="4233672" y="3944721"/>
+            <a:off x="4233672" y="4076395"/>
             <a:ext cx="594360" cy="256032"/>
           </a:xfrm>
           <a:prstGeom prst="rect">
@@ -12608,7 +12608,7 @@
         </p:nvSpPr>
         <p:spPr>
           <a:xfrm>
-            <a:off x="4937760" y="3908145"/>
+            <a:off x="4937760" y="4039819"/>
             <a:ext cx="6537960" cy="219456"/>
           </a:xfrm>
           <a:prstGeom prst="rect">
@@ -12650,8 +12650,8 @@
         </p:nvSpPr>
         <p:spPr>
           <a:xfrm>
-            <a:off x="4937760" y="4145889"/>
-            <a:ext cx="6537960" cy="232257"/>
+            <a:off x="4937760" y="4240987"/>
+            <a:ext cx="6537960" cy="263347"/>
           </a:xfrm>
           <a:prstGeom prst="rect">
             <a:avLst/>
@@ -12671,7 +12671,7 @@
               <a:spcAft>
                 <a:spcPts val="300"/>
               </a:spcAft>
-              <a:defRPr sz="1400" b="0">
+              <a:defRPr sz="1350" b="0">
                 <a:solidFill>
                   <a:srgbClr val="182B43"/>
                 </a:solidFill>
@@ -12692,8 +12692,8 @@
         </p:nvSpPr>
         <p:spPr>
           <a:xfrm>
-            <a:off x="4096512" y="4423867"/>
-            <a:ext cx="7589520" cy="534009"/>
+            <a:off x="4096512" y="4522622"/>
+            <a:ext cx="7589520" cy="501091"/>
           </a:xfrm>
           <a:prstGeom prst="roundRect">
             <a:avLst>
@@ -12737,7 +12737,7 @@
         </p:nvSpPr>
         <p:spPr>
           <a:xfrm>
-            <a:off x="4233672" y="4533595"/>
+            <a:off x="4233672" y="4632350"/>
             <a:ext cx="594360" cy="256032"/>
           </a:xfrm>
           <a:prstGeom prst="rect">
@@ -12779,7 +12779,7 @@
         </p:nvSpPr>
         <p:spPr>
           <a:xfrm>
-            <a:off x="4937760" y="4497019"/>
+            <a:off x="4937760" y="4595774"/>
             <a:ext cx="6537960" cy="219456"/>
           </a:xfrm>
           <a:prstGeom prst="rect">
@@ -12821,8 +12821,8 @@
         </p:nvSpPr>
         <p:spPr>
           <a:xfrm>
-            <a:off x="4937760" y="4734763"/>
-            <a:ext cx="6537960" cy="232257"/>
+            <a:off x="4937760" y="4796942"/>
+            <a:ext cx="6537960" cy="263347"/>
           </a:xfrm>
           <a:prstGeom prst="rect">
             <a:avLst/>
@@ -12842,7 +12842,7 @@
               <a:spcAft>
                 <a:spcPts val="300"/>
               </a:spcAft>
-              <a:defRPr sz="1400" b="0">
+              <a:defRPr sz="1350" b="0">
                 <a:solidFill>
                   <a:srgbClr val="182B43"/>
                 </a:solidFill>
@@ -12863,8 +12863,8 @@
         </p:nvSpPr>
         <p:spPr>
           <a:xfrm>
-            <a:off x="4096512" y="5012740"/>
-            <a:ext cx="7589520" cy="534009"/>
+            <a:off x="4096512" y="5078577"/>
+            <a:ext cx="7589520" cy="501091"/>
           </a:xfrm>
           <a:prstGeom prst="roundRect">
             <a:avLst>
@@ -12908,7 +12908,7 @@
         </p:nvSpPr>
         <p:spPr>
           <a:xfrm>
-            <a:off x="4233672" y="5122468"/>
+            <a:off x="4233672" y="5188305"/>
             <a:ext cx="594360" cy="256032"/>
           </a:xfrm>
           <a:prstGeom prst="rect">
@@ -12950,7 +12950,7 @@
         </p:nvSpPr>
         <p:spPr>
           <a:xfrm>
-            <a:off x="4937760" y="5085892"/>
+            <a:off x="4937760" y="5151729"/>
             <a:ext cx="6537960" cy="219456"/>
           </a:xfrm>
           <a:prstGeom prst="rect">
@@ -12992,8 +12992,8 @@
         </p:nvSpPr>
         <p:spPr>
           <a:xfrm>
-            <a:off x="4937760" y="5323636"/>
-            <a:ext cx="6537960" cy="232257"/>
+            <a:off x="4937760" y="5352897"/>
+            <a:ext cx="6537960" cy="263347"/>
           </a:xfrm>
           <a:prstGeom prst="rect">
             <a:avLst/>
@@ -13013,7 +13013,7 @@
               <a:spcAft>
                 <a:spcPts val="300"/>
               </a:spcAft>
-              <a:defRPr sz="1400" b="0">
+              <a:defRPr sz="1350" b="0">
                 <a:solidFill>
                   <a:srgbClr val="182B43"/>
                 </a:solidFill>
@@ -13034,8 +13034,8 @@
         </p:nvSpPr>
         <p:spPr>
           <a:xfrm>
-            <a:off x="4096512" y="5601614"/>
-            <a:ext cx="7589520" cy="534009"/>
+            <a:off x="4096512" y="5634532"/>
+            <a:ext cx="7589520" cy="501091"/>
           </a:xfrm>
           <a:prstGeom prst="roundRect">
             <a:avLst>
@@ -13079,7 +13079,7 @@
         </p:nvSpPr>
         <p:spPr>
           <a:xfrm>
-            <a:off x="4233672" y="5711342"/>
+            <a:off x="4233672" y="5744260"/>
             <a:ext cx="594360" cy="256032"/>
           </a:xfrm>
           <a:prstGeom prst="rect">
@@ -13121,7 +13121,7 @@
         </p:nvSpPr>
         <p:spPr>
           <a:xfrm>
-            <a:off x="4937760" y="5674766"/>
+            <a:off x="4937760" y="5707684"/>
             <a:ext cx="6537960" cy="219456"/>
           </a:xfrm>
           <a:prstGeom prst="rect">
@@ -13163,8 +13163,8 @@
         </p:nvSpPr>
         <p:spPr>
           <a:xfrm>
-            <a:off x="4937760" y="5912510"/>
-            <a:ext cx="6537960" cy="232257"/>
+            <a:off x="4937760" y="5908852"/>
+            <a:ext cx="6537960" cy="263347"/>
           </a:xfrm>
           <a:prstGeom prst="rect">
             <a:avLst/>
@@ -13184,7 +13184,7 @@
               <a:spcAft>
                 <a:spcPts val="300"/>
               </a:spcAft>
-              <a:defRPr sz="1400" b="0">
+              <a:defRPr sz="1350" b="0">
                 <a:solidFill>
                   <a:srgbClr val="182B43"/>
                 </a:solidFill>

--- a/presentations/aws-frontier-agents-common-architecture-presentation.pptx
+++ b/presentations/aws-frontier-agents-common-architecture-presentation.pptx
@@ -538,7 +538,7 @@
           <a:p/>
           <a:p>
             <a:r>
-              <a:t>This is a team-level reference design assembled from the documented behavior of four products. It is not an AWS internal architecture or a shared four-agent runtime. The common unit is a bounded engineering work item with an owner, evidence, allowed effects and completion checks. Each product retains its own identity, execution and approval model. The demo is a tabletop handoff walkthrough, not an implemented orchestrator.</a:t>
+              <a:t>This is a team-level reference design assembled from the documented behavior of three products. It is not an AWS internal architecture or a shared three-agent runtime. The common unit is a bounded engineering work item with an owner, evidence, allowed effects and completion checks. Each product retains its own identity, execution and approval model. The demo is a tabletop handoff walkthrough, not an implemented orchestrator.</a:t>
             </a:r>
           </a:p>
           <a:p/>
@@ -550,11 +550,6 @@
           <a:p>
             <a:r>
               <a:t>D01 — About AWS DevOps Agent: https://docs.aws.amazon.com/devopsagent/latest/userguide/about-aws-devops-agent.html</a:t>
-            </a:r>
-          </a:p>
-          <a:p>
-            <a:r>
-              <a:t>K02 — Kiro Web: https://kiro.dev/docs/web/</a:t>
             </a:r>
           </a:p>
           <a:p>
@@ -640,7 +635,7 @@
           <a:p/>
           <a:p>
             <a:r>
-              <a:t>MCP and the documented DevOps remote protocols can expose useful capabilities to clients. Repository and collaboration integrations provide other handoff paths. They still require their own identities, scopes and supported actions. There is no basis here to claim an out-of-the-box orchestrator across all four products. Start with a link or exported artifact, and automate only a documented interface whose failure modes the team can operate.</a:t>
+              <a:t>MCP and the documented DevOps remote protocols can expose useful capabilities to clients. Repository and collaboration integrations provide other handoff paths. They still require their own identities, scopes and supported actions. There is no basis here to claim an out-of-the-box orchestrator across all three products. Start with a link or exported artifact, and automate only a documented interface whose failure modes the team can operate.</a:t>
             </a:r>
           </a:p>
           <a:p/>
@@ -661,12 +656,7 @@
           </a:p>
           <a:p>
             <a:r>
-              <a:t>K15 — Model Context Protocol: https://kiro.dev/docs/mcp/</a:t>
-            </a:r>
-          </a:p>
-          <a:p>
-            <a:r>
-              <a:t>S26 — Code review from an IDE: https://docs.aws.amazon.com/securityagent/latest/userguide/code-review-ide-integration.html</a:t>
+              <a:t>S28 — Run penetration tests from CI/CD: https://docs.aws.amazon.com/securityagent/latest/userguide/cicd-pentest.html</a:t>
             </a:r>
           </a:p>
           <a:p>
@@ -768,11 +758,6 @@
           </a:p>
           <a:p>
             <a:r>
-              <a:t>K08 — Specifications: https://kiro.dev/docs/specs/</a:t>
-            </a:r>
-          </a:p>
-          <a:p>
-            <a:r>
               <a:t>S12 — Review penetration-test findings: https://docs.aws.amazon.com/securityagent/latest/userguide/review-penetration-findings.html</a:t>
             </a:r>
           </a:p>
@@ -870,11 +855,6 @@
           </a:p>
           <a:p>
             <a:r>
-              <a:t>K24 — Workflows: https://kiro.dev/docs/workflows/</a:t>
-            </a:r>
-          </a:p>
-          <a:p>
-            <a:r>
               <a:t>S28 — Run penetration tests from CI/CD: https://docs.aws.amazon.com/securityagent/latest/userguide/cicd-pentest.html</a:t>
             </a:r>
           </a:p>
@@ -972,11 +952,6 @@
           </a:p>
           <a:p>
             <a:r>
-              <a:t>K09 — Built-in tools: https://kiro.dev/docs/tools/</a:t>
-            </a:r>
-          </a:p>
-          <a:p>
-            <a:r>
               <a:t>S14 — Revalidate findings: https://docs.aws.amazon.com/securityagent/latest/userguide/revalidate-findings.html</a:t>
             </a:r>
           </a:p>
@@ -1074,11 +1049,6 @@
           </a:p>
           <a:p>
             <a:r>
-              <a:t>K06 — GitHub integration: https://kiro.dev/docs/web/github/</a:t>
-            </a:r>
-          </a:p>
-          <a:p>
-            <a:r>
               <a:t>S14 — Revalidate findings: https://docs.aws.amazon.com/securityagent/latest/userguide/revalidate-findings.html</a:t>
             </a:r>
           </a:p>
@@ -1160,7 +1130,7 @@
           <a:p/>
           <a:p>
             <a:r>
-              <a:t>The team should record the product surface, feature maturity, service Region, inference behavior, retention and output destinations for the workflow it actually deploys. DevOps release preview has a more limited Region footprint than production operations. Kiro client capabilities and account rollout differ. Security capability maturity is mixed. FinOps remains preview with its documented US storage and inference boundaries. Do not use an organization-wide “AWS approved” label as a substitute for this feature-level review.</a:t>
+              <a:t>Record the exact feature, maturity, service Region, inference behavior and output destination. DevOps production operations and release preview have different availability. Security features have different maturity and source/target requirements. FinOps remains a separately qualified preview workflow. Review these boundaries for each use case rather than applying a portfolio-wide approval.</a:t>
             </a:r>
           </a:p>
           <a:p/>
@@ -1172,11 +1142,6 @@
           <a:p>
             <a:r>
               <a:t>D15 — Supported Regions: https://docs.aws.amazon.com/devopsagent/latest/userguide/about-aws-devops-agent-supported-regions.html</a:t>
-            </a:r>
-          </a:p>
-          <a:p>
-            <a:r>
-              <a:t>K02 — Kiro Web: https://kiro.dev/docs/web/</a:t>
             </a:r>
           </a:p>
           <a:p>
@@ -1283,11 +1248,6 @@
           </a:p>
           <a:p>
             <a:r>
-              <a:t>K04 — Autonomous mode: https://kiro.dev/docs/web/autonomous-mode/</a:t>
-            </a:r>
-          </a:p>
-          <a:p>
-            <a:r>
               <a:t>S14 — Revalidate findings: https://docs.aws.amazon.com/securityagent/latest/userguide/revalidate-findings.html</a:t>
             </a:r>
           </a:p>
@@ -1326,7 +1286,7 @@
           </a:p>
           <a:p>
             <a:r>
-              <a:t>02:00 — Inspect the coding handoff: Show the task contract, scoped diff and independent checks.</a:t>
+              <a:t>02:00 — Inspect the team-owned change handoff: Show the task contract, scoped diff and independent checks.</a:t>
             </a:r>
           </a:p>
           <a:p>
@@ -1440,11 +1400,6 @@
           </a:p>
           <a:p>
             <a:r>
-              <a:t>K06 — GitHub integration: https://kiro.dev/docs/web/github/</a:t>
-            </a:r>
-          </a:p>
-          <a:p>
-            <a:r>
               <a:t>S10 — Security best practices: https://docs.aws.amazon.com/securityagent/latest/userguide/security-best-practices.html</a:t>
             </a:r>
           </a:p>
@@ -1542,11 +1497,6 @@
           </a:p>
           <a:p>
             <a:r>
-              <a:t>K02 — Kiro Web: https://kiro.dev/docs/web/</a:t>
-            </a:r>
-          </a:p>
-          <a:p>
-            <a:r>
               <a:t>S10 — Security best practices: https://docs.aws.amazon.com/securityagent/latest/userguide/security-best-practices.html</a:t>
             </a:r>
           </a:p>
@@ -1656,16 +1606,6 @@
           </a:p>
           <a:p>
             <a:r>
-              <a:t>K02 — GitHub integration: https://kiro.dev/docs/web/github/</a:t>
-            </a:r>
-          </a:p>
-          <a:p>
-            <a:r>
-              <a:t>K03 — Cloud sandbox: https://kiro.dev/docs/web/sandbox/</a:t>
-            </a:r>
-          </a:p>
-          <a:p>
-            <a:r>
               <a:t>S02 — Set up AWS Security Agent: https://docs.aws.amazon.com/securityagent/latest/userguide/setup-security-agent.html</a:t>
             </a:r>
           </a:p>
@@ -1757,7 +1697,7 @@
           <a:p/>
           <a:p>
             <a:r>
-              <a:t>DevOps Agent is the operational investigator, Kiro produces repository work, Security Agent supplies application-security assessment evidence, and FinOps Agent explains and routes cost work. These roles can overlap, but their output artifacts are different. A shared work-item schema makes the handoff legible without claiming shared sessions or permissions. The table is a recommended allocation of responsibility based on documented capabilities.</a:t>
+              <a:t>DevOps Agent provides operational evidence, Security Agent provides application-security assessment evidence, and FinOps Agent provides cost-analysis evidence. Their permissions and output records remain distinct. A shared work-item format is a proposed team convention, not a shared execution runtime. The engineering team retains implementation, review, merge and deployment responsibilities.</a:t>
             </a:r>
           </a:p>
           <a:p/>
@@ -1769,11 +1709,6 @@
           <a:p>
             <a:r>
               <a:t>D03 — Autonomous incident response: https://docs.aws.amazon.com/devopsagent/latest/userguide/production-operations-autonomous-incident-response.html</a:t>
-            </a:r>
-          </a:p>
-          <a:p>
-            <a:r>
-              <a:t>K04 — Autonomous mode: https://kiro.dev/docs/web/autonomous-mode/</a:t>
             </a:r>
           </a:p>
           <a:p>
@@ -1882,16 +1817,6 @@
           </a:p>
           <a:p>
             <a:r>
-              <a:t>K11 — Specifications: https://kiro.dev/docs/specs/</a:t>
-            </a:r>
-          </a:p>
-          <a:p>
-            <a:r>
-              <a:t>K02 — GitHub integration: https://kiro.dev/docs/web/github/</a:t>
-            </a:r>
-          </a:p>
-          <a:p>
-            <a:r>
               <a:t>S03 — Create a penetration test: https://docs.aws.amazon.com/securityagent/latest/userguide/perform-penetration-test.html</a:t>
             </a:r>
           </a:p>
@@ -2001,21 +1926,6 @@
           </a:p>
           <a:p>
             <a:r>
-              <a:t>K07 — Steering: https://kiro.dev/docs/steering/</a:t>
-            </a:r>
-          </a:p>
-          <a:p>
-            <a:r>
-              <a:t>K08 — Memory: https://kiro.dev/docs/memory/</a:t>
-            </a:r>
-          </a:p>
-          <a:p>
-            <a:r>
-              <a:t>K04 — Permissions: https://kiro.dev/docs/permissions/</a:t>
-            </a:r>
-          </a:p>
-          <a:p>
-            <a:r>
               <a:t>S09 — Manage security requirements: https://docs.aws.amazon.com/securityagent/latest/userguide/security-requirements.html</a:t>
             </a:r>
           </a:p>
@@ -2135,16 +2045,6 @@
           </a:p>
           <a:p>
             <a:r>
-              <a:t>K09 — Automations: https://kiro.dev/docs/web/automations/</a:t>
-            </a:r>
-          </a:p>
-          <a:p>
-            <a:r>
-              <a:t>K02 — GitHub integration: https://kiro.dev/docs/web/github/</a:t>
-            </a:r>
-          </a:p>
-          <a:p>
-            <a:r>
               <a:t>S03 — Create a penetration test: https://docs.aws.amazon.com/securityagent/latest/userguide/perform-penetration-test.html</a:t>
             </a:r>
           </a:p>
@@ -2264,11 +2164,6 @@
           </a:p>
           <a:p>
             <a:r>
-              <a:t>K04 — Permissions: https://kiro.dev/docs/permissions/</a:t>
-            </a:r>
-          </a:p>
-          <a:p>
-            <a:r>
               <a:t>S03 — Create a penetration test: https://docs.aws.amazon.com/securityagent/latest/userguide/perform-penetration-test.html</a:t>
             </a:r>
           </a:p>
@@ -2388,21 +2283,6 @@
           </a:p>
           <a:p>
             <a:r>
-              <a:t>K03 — Cloud sandbox: https://kiro.dev/docs/web/sandbox/</a:t>
-            </a:r>
-          </a:p>
-          <a:p>
-            <a:r>
-              <a:t>K05 — Sandbox internet access: https://kiro.dev/docs/web/sandbox/internet-access/</a:t>
-            </a:r>
-          </a:p>
-          <a:p>
-            <a:r>
-              <a:t>K06 — Sandbox environment variables and secrets: https://kiro.dev/docs/web/sandbox/environment-variables/</a:t>
-            </a:r>
-          </a:p>
-          <a:p>
-            <a:r>
               <a:t>S04 — Security best practices: https://docs.aws.amazon.com/securityagent/latest/userguide/security-best-practices.html</a:t>
             </a:r>
           </a:p>
@@ -2517,17 +2397,12 @@
           </a:p>
           <a:p>
             <a:r>
-              <a:t>K10 — Model Context Protocol: https://kiro.dev/docs/mcp/</a:t>
-            </a:r>
-          </a:p>
-          <a:p>
-            <a:r>
-              <a:t>S08 — Run code security scans from your IDE: https://docs.aws.amazon.com/securityagent/latest/userguide/code-review-ide-integration.html</a:t>
-            </a:r>
-          </a:p>
-          <a:p>
-            <a:r>
-              <a:t>S13 — Pricing and billing: https://docs.aws.amazon.com/securityagent/latest/userguide/pricing.html</a:t>
+              <a:t>S10 — Run penetration tests from CI/CD: https://docs.aws.amazon.com/securityagent/latest/userguide/cicd-pentest.html</a:t>
+            </a:r>
+          </a:p>
+          <a:p>
+            <a:r>
+              <a:t>S11 — Scoped-pentest GitHub Actions tutorial: https://docs.aws.amazon.com/securityagent/latest/userguide/sample-cicd-github.html</a:t>
             </a:r>
           </a:p>
           <a:p>
@@ -2636,16 +2511,6 @@
           </a:p>
           <a:p>
             <a:r>
-              <a:t>K12 — Autonomous mode: https://kiro.dev/docs/web/autonomous-mode/</a:t>
-            </a:r>
-          </a:p>
-          <a:p>
-            <a:r>
-              <a:t>K11 — Specifications: https://kiro.dev/docs/specs/</a:t>
-            </a:r>
-          </a:p>
-          <a:p>
-            <a:r>
               <a:t>S05 — Review penetration-test findings: https://docs.aws.amazon.com/securityagent/latest/userguide/review-penetration-findings.html</a:t>
             </a:r>
           </a:p>
@@ -2760,16 +2625,6 @@
           </a:p>
           <a:p>
             <a:r>
-              <a:t>K12 — Autonomous mode: https://kiro.dev/docs/web/autonomous-mode/</a:t>
-            </a:r>
-          </a:p>
-          <a:p>
-            <a:r>
-              <a:t>K02 — GitHub integration: https://kiro.dev/docs/web/github/</a:t>
-            </a:r>
-          </a:p>
-          <a:p>
-            <a:r>
               <a:t>S03 — Create a penetration test: https://docs.aws.amazon.com/securityagent/latest/userguide/perform-penetration-test.html</a:t>
             </a:r>
           </a:p>
@@ -2884,16 +2739,6 @@
           </a:p>
           <a:p>
             <a:r>
-              <a:t>K01 — Kiro Web: https://kiro.dev/docs/web/</a:t>
-            </a:r>
-          </a:p>
-          <a:p>
-            <a:r>
-              <a:t>K02 — GitHub integration: https://kiro.dev/docs/web/github/</a:t>
-            </a:r>
-          </a:p>
-          <a:p>
-            <a:r>
               <a:t>S04 — Security best practices: https://docs.aws.amazon.com/securityagent/latest/userguide/security-best-practices.html</a:t>
             </a:r>
           </a:p>
@@ -3018,16 +2863,6 @@
           </a:p>
           <a:p>
             <a:r>
-              <a:t>K12 — Autonomous mode: https://kiro.dev/docs/web/autonomous-mode/</a:t>
-            </a:r>
-          </a:p>
-          <a:p>
-            <a:r>
-              <a:t>K02 — GitHub integration: https://kiro.dev/docs/web/github/</a:t>
-            </a:r>
-          </a:p>
-          <a:p>
-            <a:r>
               <a:t>S05 — Review penetration-test findings: https://docs.aws.amazon.com/securityagent/latest/userguide/review-penetration-findings.html</a:t>
             </a:r>
           </a:p>
@@ -3135,11 +2970,6 @@
           </a:p>
           <a:p>
             <a:r>
-              <a:t>K08 — Specifications: https://kiro.dev/docs/specs/</a:t>
-            </a:r>
-          </a:p>
-          <a:p>
-            <a:r>
               <a:t>S08 — Create a penetration test: https://docs.aws.amazon.com/securityagent/latest/userguide/perform-penetration-test.html</a:t>
             </a:r>
           </a:p>
@@ -3244,11 +3074,6 @@
           </a:p>
           <a:p>
             <a:r>
-              <a:t>K01 — Kiro Web: https://kiro.dev/docs/web/</a:t>
-            </a:r>
-          </a:p>
-          <a:p>
-            <a:r>
               <a:t>S12 — Resilience and regional availability: https://docs.aws.amazon.com/securityagent/latest/userguide/resilience.html</a:t>
             </a:r>
           </a:p>
@@ -3441,71 +3266,6 @@
           </a:p>
           <a:p>
             <a:r>
-              <a:t>K02 — Kiro Web: https://kiro.dev/docs/web/</a:t>
-            </a:r>
-          </a:p>
-          <a:p>
-            <a:r>
-              <a:t>K03 — Working with the agent: https://kiro.dev/docs/web/using-the-agent/</a:t>
-            </a:r>
-          </a:p>
-          <a:p>
-            <a:r>
-              <a:t>K04 — Autonomous mode: https://kiro.dev/docs/web/autonomous-mode/</a:t>
-            </a:r>
-          </a:p>
-          <a:p>
-            <a:r>
-              <a:t>K06 — GitHub integration: https://kiro.dev/docs/web/github/</a:t>
-            </a:r>
-          </a:p>
-          <a:p>
-            <a:r>
-              <a:t>K08 — Specifications: https://kiro.dev/docs/specs/</a:t>
-            </a:r>
-          </a:p>
-          <a:p>
-            <a:r>
-              <a:t>K09 — Built-in tools: https://kiro.dev/docs/tools/</a:t>
-            </a:r>
-          </a:p>
-          <a:p>
-            <a:r>
-              <a:t>K10 — Cloud sandbox: https://kiro.dev/docs/web/sandbox/</a:t>
-            </a:r>
-          </a:p>
-          <a:p>
-            <a:r>
-              <a:t>K13 — Steering: https://kiro.dev/docs/steering/</a:t>
-            </a:r>
-          </a:p>
-          <a:p>
-            <a:r>
-              <a:t>K14 — Memory: https://kiro.dev/docs/memory/</a:t>
-            </a:r>
-          </a:p>
-          <a:p>
-            <a:r>
-              <a:t>K15 — Model Context Protocol: https://kiro.dev/docs/mcp/</a:t>
-            </a:r>
-          </a:p>
-          <a:p>
-            <a:r>
-              <a:t>K19 — Sandbox internet access: https://kiro.dev/docs/web/sandbox/internet-access/</a:t>
-            </a:r>
-          </a:p>
-          <a:p>
-            <a:r>
-              <a:t>K20 — Environment variables and secrets: https://kiro.dev/docs/web/sandbox/environment-variables/</a:t>
-            </a:r>
-          </a:p>
-          <a:p>
-            <a:r>
-              <a:t>K24 — Workflows: https://kiro.dev/docs/workflows/</a:t>
-            </a:r>
-          </a:p>
-          <a:p>
-            <a:r>
               <a:t>S04 — What is AWS Security Agent?: https://docs.aws.amazon.com/securityagent/latest/userguide/what-is.html</a:t>
             </a:r>
           </a:p>
@@ -3532,11 +3292,6 @@
           <a:p>
             <a:r>
               <a:t>S14 — Revalidate findings: https://docs.aws.amazon.com/securityagent/latest/userguide/revalidate-findings.html</a:t>
-            </a:r>
-          </a:p>
-          <a:p>
-            <a:r>
-              <a:t>S26 — Code review from an IDE: https://docs.aws.amazon.com/securityagent/latest/userguide/code-review-ide-integration.html</a:t>
             </a:r>
           </a:p>
           <a:p>
@@ -3622,7 +3377,7 @@
           <a:p/>
           <a:p>
             <a:r>
-              <a:t>An incident can lead to a code change, a security finding to a repair, or a cost anomaly to an infrastructure work item. The daily review aggregates accepted evidence into an owned backlog. Do not force all four agents into every task. Manual artifact handoffs are often sufficient to prove the operating model before building automation. Each row is a proposed team workflow, not a turnkey integration supplied by AWS.</a:t>
+              <a:t>An incident can lead to a code change, a security finding to a repair, or a cost anomaly to an infrastructure work item. The daily review aggregates accepted evidence into an owned backlog. Do not force all three agents into every task. Manual artifact handoffs are often sufficient to prove the operating model before building automation. Each row is a proposed team workflow, not a turnkey integration supplied by AWS.</a:t>
             </a:r>
           </a:p>
           <a:p/>
@@ -3634,11 +3389,6 @@
           <a:p>
             <a:r>
               <a:t>D04 — Proactive incident prevention: https://docs.aws.amazon.com/devopsagent/latest/userguide/production-operations-proactive-incident-prevention.html</a:t>
-            </a:r>
-          </a:p>
-          <a:p>
-            <a:r>
-              <a:t>K04 — Autonomous mode: https://kiro.dev/docs/web/autonomous-mode/</a:t>
             </a:r>
           </a:p>
           <a:p>
@@ -3745,11 +3495,6 @@
           </a:p>
           <a:p>
             <a:r>
-              <a:t>K06 — GitHub integration: https://kiro.dev/docs/web/github/</a:t>
-            </a:r>
-          </a:p>
-          <a:p>
-            <a:r>
               <a:t>S08 — Create a penetration test: https://docs.aws.amazon.com/securityagent/latest/userguide/perform-penetration-test.html</a:t>
             </a:r>
           </a:p>
@@ -3847,11 +3592,6 @@
           </a:p>
           <a:p>
             <a:r>
-              <a:t>K03 — Working with the agent: https://kiro.dev/docs/web/using-the-agent/</a:t>
-            </a:r>
-          </a:p>
-          <a:p>
-            <a:r>
               <a:t>S12 — Review penetration-test findings: https://docs.aws.amazon.com/securityagent/latest/userguide/review-penetration-findings.html</a:t>
             </a:r>
           </a:p>
@@ -3933,23 +3673,13 @@
           <a:p/>
           <a:p>
             <a:r>
-              <a:t>Steering, skills, memory and context files improve relevance. They must not be treated as permission boundaries or proof of policy enforcement. Treat source content as evidence, not as authority to ignore the task’s restrictions. Keep secrets out of context artifacts unless the approved workflow specifically requires them. When stable policy and learned context conflict, verify current policy and correct the context.</a:t>
+              <a:t>Instructions, skills, memory and context files improve relevance. They must not be treated as permission boundaries or proof of policy enforcement. Treat source content as evidence, not as authority to ignore the task’s restrictions. Keep secrets out of context artifacts unless the approved workflow specifically requires them. When stable policy and learned context conflict, verify current policy and correct the context.</a:t>
             </a:r>
           </a:p>
           <a:p/>
           <a:p>
             <a:r>
               <a:t>Official evidence:</a:t>
-            </a:r>
-          </a:p>
-          <a:p>
-            <a:r>
-              <a:t>K13 — Steering: https://kiro.dev/docs/steering/</a:t>
-            </a:r>
-          </a:p>
-          <a:p>
-            <a:r>
-              <a:t>K14 — Memory: https://kiro.dev/docs/memory/</a:t>
             </a:r>
           </a:p>
           <a:p>
@@ -4035,7 +3765,7 @@
           <a:p/>
           <a:p>
             <a:r>
-              <a:t>A single “human in the loop” box hides important differences. DevOps directed actions require explicit enablement and approval. Active release tests can mutate a target through application requests. Kiro’s output reaches a reviewable branch, with merging under team control. FinOps collaboration writes have trigger-dependent approval rules. Model the real effect and apply the correct gate; do not assume a prompt before every mutation.</a:t>
+              <a:t>Approval must match the actual effect. DevOps directed actions require explicit enablement and approval. Active application tests can change the target through real requests. FinOps collaboration writes have trigger-dependent approval rules. Code implementation and release remain team-owned responsibilities. Do not infer a prompt before every mutation.</a:t>
             </a:r>
           </a:p>
           <a:p/>
@@ -4052,11 +3782,6 @@
           <a:p>
             <a:r>
               <a:t>D11 — Release testing: https://docs.aws.amazon.com/devopsagent/latest/userguide/release-management-release-testing.html</a:t>
-            </a:r>
-          </a:p>
-          <a:p>
-            <a:r>
-              <a:t>K02 — Kiro Web: https://kiro.dev/docs/web/</a:t>
             </a:r>
           </a:p>
           <a:p>
@@ -4144,21 +3869,6 @@
           <a:p>
             <a:r>
               <a:t>Official evidence:</a:t>
-            </a:r>
-          </a:p>
-          <a:p>
-            <a:r>
-              <a:t>K10 — Cloud sandbox: https://kiro.dev/docs/web/sandbox/</a:t>
-            </a:r>
-          </a:p>
-          <a:p>
-            <a:r>
-              <a:t>K19 — Sandbox internet access: https://kiro.dev/docs/web/sandbox/internet-access/</a:t>
-            </a:r>
-          </a:p>
-          <a:p>
-            <a:r>
-              <a:t>K20 — Environment variables and secrets: https://kiro.dev/docs/web/sandbox/environment-variables/</a:t>
             </a:r>
           </a:p>
           <a:p>
@@ -7515,7 +7225,7 @@
               </a:defRPr>
             </a:pPr>
             <a:r>
-              <a:t>Official source IDs: D01, K02, S04, F03</a:t>
+              <a:t>Official source IDs: D01, S04, F03</a:t>
             </a:r>
           </a:p>
         </p:txBody>
@@ -7953,7 +7663,7 @@
               </a:defRPr>
             </a:pPr>
             <a:r>
-              <a:t>4 agents</a:t>
+              <a:t>3 agents</a:t>
             </a:r>
           </a:p>
         </p:txBody>
@@ -8401,7 +8111,7 @@
               </a:defRPr>
             </a:pPr>
             <a:r>
-              <a:t>Official source IDs: D37, D38, K15, S26, F13, F14</a:t>
+              <a:t>Official source IDs: D37, D38, S28, F13, F14</a:t>
             </a:r>
           </a:p>
         </p:txBody>
@@ -8429,7 +8139,7 @@
                 <a:gridCol w="3727704"/>
                 <a:gridCol w="3727704"/>
               </a:tblGrid>
-              <a:tr h="771753">
+              <a:tr h="964692">
                 <a:tc>
                   <a:txBody>
                     <a:bodyPr/>
@@ -8512,7 +8222,7 @@
                   </a:tcPr>
                 </a:tc>
               </a:tr>
-              <a:tr h="771753">
+              <a:tr h="964692">
                 <a:tc>
                   <a:txBody>
                     <a:bodyPr/>
@@ -8557,7 +8267,7 @@
                         </a:defRPr>
                       </a:pPr>
                       <a:r>
-                        <a:t>Client/agent access to an Agent Space</a:t>
+                        <a:t>Scoped client access to an Agent Space</a:t>
                       </a:r>
                     </a:p>
                   </a:txBody>
@@ -8584,7 +8294,7 @@
                         </a:defRPr>
                       </a:pPr>
                       <a:r>
-                        <a:t>Shared credentials with other specialists</a:t>
+                        <a:t>Shared credentials across specialists</a:t>
                       </a:r>
                     </a:p>
                   </a:txBody>
@@ -8595,7 +8305,7 @@
                   </a:tcPr>
                 </a:tc>
               </a:tr>
-              <a:tr h="771753">
+              <a:tr h="964692">
                 <a:tc>
                   <a:txBody>
                     <a:bodyPr/>
@@ -8613,7 +8323,7 @@
                         </a:defRPr>
                       </a:pPr>
                       <a:r>
-                        <a:t>Kiro MCP / tools</a:t>
+                        <a:t>Security CI/CD integration</a:t>
                       </a:r>
                     </a:p>
                   </a:txBody>
@@ -8640,7 +8350,7 @@
                         </a:defRPr>
                       </a:pPr>
                       <a:r>
-                        <a:t>Extend the coding workflow</a:t>
+                        <a:t>Submit scoped assessment work and inspect results</a:t>
                       </a:r>
                     </a:p>
                   </a:txBody>
@@ -8667,7 +8377,7 @@
                         </a:defRPr>
                       </a:pPr>
                       <a:r>
-                        <a:t>Universal provider or client parity</a:t>
+                        <a:t>Blanket coverage or automatic release authority</a:t>
                       </a:r>
                     </a:p>
                   </a:txBody>
@@ -8678,7 +8388,7 @@
                   </a:tcPr>
                 </a:tc>
               </a:tr>
-              <a:tr h="771753">
+              <a:tr h="964692">
                 <a:tc>
                   <a:txBody>
                     <a:bodyPr/>
@@ -8696,7 +8406,7 @@
                         </a:defRPr>
                       </a:pPr>
                       <a:r>
-                        <a:t>Security IDE / pipeline</a:t>
+                        <a:t>FinOps Jira / Slack</a:t>
                       </a:r>
                     </a:p>
                   </a:txBody>
@@ -8723,7 +8433,7 @@
                         </a:defRPr>
                       </a:pPr>
                       <a:r>
-                        <a:t>Submit assessment work from developer tooling</a:t>
+                        <a:t>Route outputs through configured destinations</a:t>
                       </a:r>
                     </a:p>
                   </a:txBody>
@@ -8750,96 +8460,13 @@
                         </a:defRPr>
                       </a:pPr>
                       <a:r>
-                        <a:t>Local-only execution or blanket coverage</a:t>
+                        <a:t>General Jira administration or inbound Slack commands</a:t>
                       </a:r>
                     </a:p>
                   </a:txBody>
                   <a:tcPr marL="128016" marR="128016" marT="82296" marB="54864">
                     <a:solidFill>
                       <a:srgbClr val="F1F5F8"/>
-                    </a:solidFill>
-                  </a:tcPr>
-                </a:tc>
-              </a:tr>
-              <a:tr h="771756">
-                <a:tc>
-                  <a:txBody>
-                    <a:bodyPr/>
-                    <a:lstStyle/>
-                    <a:p>
-                      <a:pPr>
-                        <a:spcAft>
-                          <a:spcPts val="0"/>
-                        </a:spcAft>
-                        <a:defRPr sz="1600" b="0">
-                          <a:solidFill>
-                            <a:srgbClr val="182B43"/>
-                          </a:solidFill>
-                          <a:latin typeface="Arial"/>
-                        </a:defRPr>
-                      </a:pPr>
-                      <a:r>
-                        <a:t>FinOps Jira / Slack</a:t>
-                      </a:r>
-                    </a:p>
-                  </a:txBody>
-                  <a:tcPr marL="128016" marR="128016" marT="82296" marB="54864">
-                    <a:solidFill>
-                      <a:srgbClr val="FFFFFF"/>
-                    </a:solidFill>
-                  </a:tcPr>
-                </a:tc>
-                <a:tc>
-                  <a:txBody>
-                    <a:bodyPr/>
-                    <a:lstStyle/>
-                    <a:p>
-                      <a:pPr>
-                        <a:spcAft>
-                          <a:spcPts val="0"/>
-                        </a:spcAft>
-                        <a:defRPr sz="1600" b="0">
-                          <a:solidFill>
-                            <a:srgbClr val="182B43"/>
-                          </a:solidFill>
-                          <a:latin typeface="Arial"/>
-                        </a:defRPr>
-                      </a:pPr>
-                      <a:r>
-                        <a:t>Route approved outputs</a:t>
-                      </a:r>
-                    </a:p>
-                  </a:txBody>
-                  <a:tcPr marL="128016" marR="128016" marT="82296" marB="54864">
-                    <a:solidFill>
-                      <a:srgbClr val="FFFFFF"/>
-                    </a:solidFill>
-                  </a:tcPr>
-                </a:tc>
-                <a:tc>
-                  <a:txBody>
-                    <a:bodyPr/>
-                    <a:lstStyle/>
-                    <a:p>
-                      <a:pPr>
-                        <a:spcAft>
-                          <a:spcPts val="0"/>
-                        </a:spcAft>
-                        <a:defRPr sz="1600" b="0">
-                          <a:solidFill>
-                            <a:srgbClr val="182B43"/>
-                          </a:solidFill>
-                          <a:latin typeface="Arial"/>
-                        </a:defRPr>
-                      </a:pPr>
-                      <a:r>
-                        <a:t>General Jira administration or inbound Slack commands</a:t>
-                      </a:r>
-                    </a:p>
-                  </a:txBody>
-                  <a:tcPr marL="128016" marR="128016" marT="82296" marB="54864">
-                    <a:solidFill>
-                      <a:srgbClr val="FFFFFF"/>
                     </a:solidFill>
                   </a:tcPr>
                 </a:tc>
@@ -9207,7 +8834,7 @@
               </a:defRPr>
             </a:pPr>
             <a:r>
-              <a:t>Official source IDs: D03, K08, S12, F09</a:t>
+              <a:t>Official source IDs: D03, S12, F09</a:t>
             </a:r>
           </a:p>
         </p:txBody>
@@ -10120,7 +9747,7 @@
               </a:defRPr>
             </a:pPr>
             <a:r>
-              <a:t>Official source IDs: D06, K24, S28, F11</a:t>
+              <a:t>Official source IDs: D06, S28, F11</a:t>
             </a:r>
           </a:p>
         </p:txBody>
@@ -11176,7 +10803,7 @@
               </a:defRPr>
             </a:pPr>
             <a:r>
-              <a:t>Official source IDs: D03, K09, S14, F06</a:t>
+              <a:t>Official source IDs: D03, S14, F06</a:t>
             </a:r>
           </a:p>
         </p:txBody>
@@ -11982,7 +11609,7 @@
               </a:defRPr>
             </a:pPr>
             <a:r>
-              <a:t>Official source IDs: D03, K06, S14, F11</a:t>
+              <a:t>Official source IDs: D03, S14, F11</a:t>
             </a:r>
           </a:p>
         </p:txBody>
@@ -13038,7 +12665,7 @@
               </a:defRPr>
             </a:pPr>
             <a:r>
-              <a:t>Official source IDs: D15, K02, S05, S30, F16</a:t>
+              <a:t>Official source IDs: D15, S05, S30, F16</a:t>
             </a:r>
           </a:p>
         </p:txBody>
@@ -13066,7 +12693,7 @@
                 <a:gridCol w="3727704"/>
                 <a:gridCol w="3727704"/>
               </a:tblGrid>
-              <a:tr h="771753">
+              <a:tr h="964692">
                 <a:tc>
                   <a:txBody>
                     <a:bodyPr/>
@@ -13149,7 +12776,7 @@
                   </a:tcPr>
                 </a:tc>
               </a:tr>
-              <a:tr h="771753">
+              <a:tr h="964692">
                 <a:tc>
                   <a:txBody>
                     <a:bodyPr/>
@@ -13232,7 +12859,7 @@
                   </a:tcPr>
                 </a:tc>
               </a:tr>
-              <a:tr h="771753">
+              <a:tr h="964692">
                 <a:tc>
                   <a:txBody>
                     <a:bodyPr/>
@@ -13250,7 +12877,7 @@
                         </a:defRPr>
                       </a:pPr>
                       <a:r>
-                        <a:t>Kiro</a:t>
+                        <a:t>Security</a:t>
                       </a:r>
                     </a:p>
                   </a:txBody>
@@ -13277,7 +12904,7 @@
                         </a:defRPr>
                       </a:pPr>
                       <a:r>
-                        <a:t>Web, IDE and CLI differ; account rollout matters</a:t>
+                        <a:t>Pentest GA; other workflows include preview</a:t>
                       </a:r>
                     </a:p>
                   </a:txBody>
@@ -13304,7 +12931,7 @@
                         </a:defRPr>
                       </a:pPr>
                       <a:r>
-                        <a:t>Does this client actually support the required control?</a:t>
+                        <a:t>What target, source and inference boundaries apply?</a:t>
                       </a:r>
                     </a:p>
                   </a:txBody>
@@ -13315,7 +12942,7 @@
                   </a:tcPr>
                 </a:tc>
               </a:tr>
-              <a:tr h="771753">
+              <a:tr h="964692">
                 <a:tc>
                   <a:txBody>
                     <a:bodyPr/>
@@ -13333,7 +12960,7 @@
                         </a:defRPr>
                       </a:pPr>
                       <a:r>
-                        <a:t>Security</a:t>
+                        <a:t>FinOps</a:t>
                       </a:r>
                     </a:p>
                   </a:txBody>
@@ -13360,7 +12987,7 @@
                         </a:defRPr>
                       </a:pPr>
                       <a:r>
-                        <a:t>Pentest GA; other workflows include preview</a:t>
+                        <a:t>Whole service preview</a:t>
                       </a:r>
                     </a:p>
                   </a:txBody>
@@ -13387,96 +13014,13 @@
                         </a:defRPr>
                       </a:pPr>
                       <a:r>
-                        <a:t>What target, source and inference boundaries apply?</a:t>
+                        <a:t>Is us-east-1 storage / US inference acceptable?</a:t>
                       </a:r>
                     </a:p>
                   </a:txBody>
                   <a:tcPr marL="128016" marR="128016" marT="82296" marB="54864">
                     <a:solidFill>
                       <a:srgbClr val="F1F5F8"/>
-                    </a:solidFill>
-                  </a:tcPr>
-                </a:tc>
-              </a:tr>
-              <a:tr h="771756">
-                <a:tc>
-                  <a:txBody>
-                    <a:bodyPr/>
-                    <a:lstStyle/>
-                    <a:p>
-                      <a:pPr>
-                        <a:spcAft>
-                          <a:spcPts val="0"/>
-                        </a:spcAft>
-                        <a:defRPr sz="1600" b="0">
-                          <a:solidFill>
-                            <a:srgbClr val="182B43"/>
-                          </a:solidFill>
-                          <a:latin typeface="Arial"/>
-                        </a:defRPr>
-                      </a:pPr>
-                      <a:r>
-                        <a:t>FinOps</a:t>
-                      </a:r>
-                    </a:p>
-                  </a:txBody>
-                  <a:tcPr marL="128016" marR="128016" marT="82296" marB="54864">
-                    <a:solidFill>
-                      <a:srgbClr val="FFFFFF"/>
-                    </a:solidFill>
-                  </a:tcPr>
-                </a:tc>
-                <a:tc>
-                  <a:txBody>
-                    <a:bodyPr/>
-                    <a:lstStyle/>
-                    <a:p>
-                      <a:pPr>
-                        <a:spcAft>
-                          <a:spcPts val="0"/>
-                        </a:spcAft>
-                        <a:defRPr sz="1600" b="0">
-                          <a:solidFill>
-                            <a:srgbClr val="182B43"/>
-                          </a:solidFill>
-                          <a:latin typeface="Arial"/>
-                        </a:defRPr>
-                      </a:pPr>
-                      <a:r>
-                        <a:t>Whole service preview</a:t>
-                      </a:r>
-                    </a:p>
-                  </a:txBody>
-                  <a:tcPr marL="128016" marR="128016" marT="82296" marB="54864">
-                    <a:solidFill>
-                      <a:srgbClr val="FFFFFF"/>
-                    </a:solidFill>
-                  </a:tcPr>
-                </a:tc>
-                <a:tc>
-                  <a:txBody>
-                    <a:bodyPr/>
-                    <a:lstStyle/>
-                    <a:p>
-                      <a:pPr>
-                        <a:spcAft>
-                          <a:spcPts val="0"/>
-                        </a:spcAft>
-                        <a:defRPr sz="1600" b="0">
-                          <a:solidFill>
-                            <a:srgbClr val="182B43"/>
-                          </a:solidFill>
-                          <a:latin typeface="Arial"/>
-                        </a:defRPr>
-                      </a:pPr>
-                      <a:r>
-                        <a:t>Is us-east-1 storage / US inference acceptable?</a:t>
-                      </a:r>
-                    </a:p>
-                  </a:txBody>
-                  <a:tcPr marL="128016" marR="128016" marT="82296" marB="54864">
-                    <a:solidFill>
-                      <a:srgbClr val="FFFFFF"/>
                     </a:solidFill>
                   </a:tcPr>
                 </a:tc>
@@ -13844,7 +13388,7 @@
               </a:defRPr>
             </a:pPr>
             <a:r>
-              <a:t>Official source IDs: D03, K04, S14, F09</a:t>
+              <a:t>Official source IDs: D03, S14, F09</a:t>
             </a:r>
           </a:p>
         </p:txBody>
@@ -14654,7 +14198,7 @@
               </a:defRPr>
             </a:pPr>
             <a:r>
-              <a:t>Inspect the coding handoff</a:t>
+              <a:t>Inspect the team-owned change handoff</a:t>
             </a:r>
           </a:p>
         </p:txBody>
@@ -15402,7 +14946,7 @@
               </a:defRPr>
             </a:pPr>
             <a:r>
-              <a:t>Official source IDs: D13, K06, S10, F15</a:t>
+              <a:t>Official source IDs: D13, S10, F15</a:t>
             </a:r>
           </a:p>
         </p:txBody>
@@ -16208,7 +15752,7 @@
               </a:defRPr>
             </a:pPr>
             <a:r>
-              <a:t>Official source IDs: D13, K02, S10, F15</a:t>
+              <a:t>Official source IDs: D13, S10, F15</a:t>
             </a:r>
           </a:p>
         </p:txBody>
@@ -17620,7 +17164,7 @@
               </a:defRPr>
             </a:pPr>
             <a:r>
-              <a:t>Official source IDs: D01, D05, K02, K03, S02, S03, F01, F02</a:t>
+              <a:t>Official source IDs: D01, D05, S02, S03, F01, F02</a:t>
             </a:r>
           </a:p>
         </p:txBody>
@@ -17984,7 +17528,7 @@
               </a:defRPr>
             </a:pPr>
             <a:r>
-              <a:t>Official source IDs: D03, K04, S12, F07</a:t>
+              <a:t>Official source IDs: D03, S12, F07</a:t>
             </a:r>
           </a:p>
         </p:txBody>
@@ -18012,7 +17556,7 @@
                 <a:gridCol w="3727704"/>
                 <a:gridCol w="3727704"/>
               </a:tblGrid>
-              <a:tr h="771753">
+              <a:tr h="964692">
                 <a:tc>
                   <a:txBody>
                     <a:bodyPr/>
@@ -18095,7 +17639,7 @@
                   </a:tcPr>
                 </a:tc>
               </a:tr>
-              <a:tr h="771753">
+              <a:tr h="964692">
                 <a:tc>
                   <a:txBody>
                     <a:bodyPr/>
@@ -18178,7 +17722,7 @@
                   </a:tcPr>
                 </a:tc>
               </a:tr>
-              <a:tr h="771753">
+              <a:tr h="964692">
                 <a:tc>
                   <a:txBody>
                     <a:bodyPr/>
@@ -18196,7 +17740,7 @@
                         </a:defRPr>
                       </a:pPr>
                       <a:r>
-                        <a:t>Kiro</a:t>
+                        <a:t>Security Agent</a:t>
                       </a:r>
                     </a:p>
                   </a:txBody>
@@ -18223,7 +17767,7 @@
                         </a:defRPr>
                       </a:pPr>
                       <a:r>
-                        <a:t>Bounded change and repository context</a:t>
+                        <a:t>Authorized target or design/source scope</a:t>
                       </a:r>
                     </a:p>
                   </a:txBody>
@@ -18250,7 +17794,7 @@
                         </a:defRPr>
                       </a:pPr>
                       <a:r>
-                        <a:t>Spec, diff, tests and PR/MR</a:t>
+                        <a:t>Findings, proposed repair and reassessment</a:t>
                       </a:r>
                     </a:p>
                   </a:txBody>
@@ -18261,7 +17805,7 @@
                   </a:tcPr>
                 </a:tc>
               </a:tr>
-              <a:tr h="771753">
+              <a:tr h="964692">
                 <a:tc>
                   <a:txBody>
                     <a:bodyPr/>
@@ -18279,7 +17823,7 @@
                         </a:defRPr>
                       </a:pPr>
                       <a:r>
-                        <a:t>Security Agent</a:t>
+                        <a:t>FinOps Agent</a:t>
                       </a:r>
                     </a:p>
                   </a:txBody>
@@ -18306,7 +17850,7 @@
                         </a:defRPr>
                       </a:pPr>
                       <a:r>
-                        <a:t>Authorized target or design/source scope</a:t>
+                        <a:t>Cost scope and ownership context</a:t>
                       </a:r>
                     </a:p>
                   </a:txBody>
@@ -18333,96 +17877,13 @@
                         </a:defRPr>
                       </a:pPr>
                       <a:r>
-                        <a:t>Findings, proposed repair and reassessment</a:t>
+                        <a:t>Reconciled explanation and cost-work handoff</a:t>
                       </a:r>
                     </a:p>
                   </a:txBody>
                   <a:tcPr marL="128016" marR="128016" marT="82296" marB="54864">
                     <a:solidFill>
                       <a:srgbClr val="F1F5F8"/>
-                    </a:solidFill>
-                  </a:tcPr>
-                </a:tc>
-              </a:tr>
-              <a:tr h="771756">
-                <a:tc>
-                  <a:txBody>
-                    <a:bodyPr/>
-                    <a:lstStyle/>
-                    <a:p>
-                      <a:pPr>
-                        <a:spcAft>
-                          <a:spcPts val="0"/>
-                        </a:spcAft>
-                        <a:defRPr sz="1600" b="0">
-                          <a:solidFill>
-                            <a:srgbClr val="182B43"/>
-                          </a:solidFill>
-                          <a:latin typeface="Arial"/>
-                        </a:defRPr>
-                      </a:pPr>
-                      <a:r>
-                        <a:t>FinOps Agent</a:t>
-                      </a:r>
-                    </a:p>
-                  </a:txBody>
-                  <a:tcPr marL="128016" marR="128016" marT="82296" marB="54864">
-                    <a:solidFill>
-                      <a:srgbClr val="FFFFFF"/>
-                    </a:solidFill>
-                  </a:tcPr>
-                </a:tc>
-                <a:tc>
-                  <a:txBody>
-                    <a:bodyPr/>
-                    <a:lstStyle/>
-                    <a:p>
-                      <a:pPr>
-                        <a:spcAft>
-                          <a:spcPts val="0"/>
-                        </a:spcAft>
-                        <a:defRPr sz="1600" b="0">
-                          <a:solidFill>
-                            <a:srgbClr val="182B43"/>
-                          </a:solidFill>
-                          <a:latin typeface="Arial"/>
-                        </a:defRPr>
-                      </a:pPr>
-                      <a:r>
-                        <a:t>Cost scope and ownership context</a:t>
-                      </a:r>
-                    </a:p>
-                  </a:txBody>
-                  <a:tcPr marL="128016" marR="128016" marT="82296" marB="54864">
-                    <a:solidFill>
-                      <a:srgbClr val="FFFFFF"/>
-                    </a:solidFill>
-                  </a:tcPr>
-                </a:tc>
-                <a:tc>
-                  <a:txBody>
-                    <a:bodyPr/>
-                    <a:lstStyle/>
-                    <a:p>
-                      <a:pPr>
-                        <a:spcAft>
-                          <a:spcPts val="0"/>
-                        </a:spcAft>
-                        <a:defRPr sz="1600" b="0">
-                          <a:solidFill>
-                            <a:srgbClr val="182B43"/>
-                          </a:solidFill>
-                          <a:latin typeface="Arial"/>
-                        </a:defRPr>
-                      </a:pPr>
-                      <a:r>
-                        <a:t>Reconciled explanation and cost-work handoff</a:t>
-                      </a:r>
-                    </a:p>
-                  </a:txBody>
-                  <a:tcPr marL="128016" marR="128016" marT="82296" marB="54864">
-                    <a:solidFill>
-                      <a:srgbClr val="FFFFFF"/>
                     </a:solidFill>
                   </a:tcPr>
                 </a:tc>
@@ -19445,7 +18906,7 @@
               </a:defRPr>
             </a:pPr>
             <a:r>
-              <a:t>Official source IDs: D02, K11, K02, S03, F09, F04</a:t>
+              <a:t>Official source IDs: D02, S03, F09, F04</a:t>
             </a:r>
           </a:p>
         </p:txBody>
@@ -20464,7 +19925,7 @@
               </a:defRPr>
             </a:pPr>
             <a:r>
-              <a:t>Official source IDs: D03, K07, K08, K04, S09, S13, S02, F04</a:t>
+              <a:t>Official source IDs: D03, S09, S13, S02, F04</a:t>
             </a:r>
           </a:p>
         </p:txBody>
@@ -21483,7 +20944,7 @@
               </a:defRPr>
             </a:pPr>
             <a:r>
-              <a:t>Official source IDs: D02, D03, K09, K02, S03, S11, F05, F08</a:t>
+              <a:t>Official source IDs: D02, D03, S03, S11, F05, F08</a:t>
             </a:r>
           </a:p>
         </p:txBody>
@@ -22502,7 +21963,7 @@
               </a:defRPr>
             </a:pPr>
             <a:r>
-              <a:t>Official source IDs: D04, D05, K04, S03, S04, F03, F05</a:t>
+              <a:t>Official source IDs: D04, D05, S03, S04, F03, F05</a:t>
             </a:r>
           </a:p>
         </p:txBody>
@@ -23521,7 +22982,7 @@
               </a:defRPr>
             </a:pPr>
             <a:r>
-              <a:t>Official source IDs: D08, D09, K03, K05, K06, S04, F01, F03</a:t>
+              <a:t>Official source IDs: D08, D09, S04, F01, F03</a:t>
             </a:r>
           </a:p>
         </p:txBody>
@@ -24498,7 +23959,7 @@
               </a:defRPr>
             </a:pPr>
             <a:r>
-              <a:t>MCP compatibility is not a shared authorization domain. This report does not establish a generic FinOps MCP endpoint, common cross-agent API, or built-in four-agent orchestration service.</a:t>
+              <a:t>MCP compatibility is not a shared authorization domain. This report does not establish a generic FinOps MCP endpoint, common cross-agent API, or built-in three-agent orchestration service.</a:t>
             </a:r>
           </a:p>
         </p:txBody>
@@ -24540,7 +24001,7 @@
               </a:defRPr>
             </a:pPr>
             <a:r>
-              <a:t>Official source IDs: D06, D07, K10, S08, S13, F10, F11</a:t>
+              <a:t>Official source IDs: D06, D07, S10, S11, F10, F11</a:t>
             </a:r>
           </a:p>
         </p:txBody>
@@ -25559,7 +25020,7 @@
               </a:defRPr>
             </a:pPr>
             <a:r>
-              <a:t>Official source IDs: D10, K12, K11, S05, S07, F07, F10</a:t>
+              <a:t>Official source IDs: D10, S05, S07, F07, F10</a:t>
             </a:r>
           </a:p>
         </p:txBody>
@@ -26578,7 +26039,7 @@
               </a:defRPr>
             </a:pPr>
             <a:r>
-              <a:t>Official source IDs: D03, K12, K02, S03, S10, S13, F05</a:t>
+              <a:t>Official source IDs: D03, S03, S10, S13, F05</a:t>
             </a:r>
           </a:p>
         </p:txBody>
@@ -27597,7 +27058,7 @@
               </a:defRPr>
             </a:pPr>
             <a:r>
-              <a:t>Official source IDs: D11, K01, K02, S04, S06, F03, F07, F09</a:t>
+              <a:t>Official source IDs: D11, S04, S06, F03, F07, F09</a:t>
             </a:r>
           </a:p>
         </p:txBody>
@@ -28616,7 +28077,7 @@
               </a:defRPr>
             </a:pPr>
             <a:r>
-              <a:t>Official source IDs: D04, D03, K12, K02, S05, S06, F05, F09</a:t>
+              <a:t>Official source IDs: D04, D03, S05, S06, F05, F09</a:t>
             </a:r>
           </a:p>
         </p:txBody>
@@ -28980,7 +28441,7 @@
               </a:defRPr>
             </a:pPr>
             <a:r>
-              <a:t>Official source IDs: D03, K08, S08, F11</a:t>
+              <a:t>Official source IDs: D03, S08, F11</a:t>
             </a:r>
           </a:p>
         </p:txBody>
@@ -30691,7 +30152,7 @@
               </a:defRPr>
             </a:pPr>
             <a:r>
-              <a:t>Official source IDs: D09, K01, S12, F06</a:t>
+              <a:t>Official source IDs: D09, S12, F06</a:t>
             </a:r>
           </a:p>
         </p:txBody>
@@ -31689,7 +31150,7 @@
               </a:defRPr>
             </a:pPr>
             <a:r>
-              <a:t>Official source IDs: D04, K04, S14, F09, F11</a:t>
+              <a:t>Official source IDs: D04, S14, F09, F11</a:t>
             </a:r>
           </a:p>
         </p:txBody>
@@ -31845,7 +31306,7 @@
                         </a:defRPr>
                       </a:pPr>
                       <a:r>
-                        <a:t>DevOps evidence → Kiro reviewable change</a:t>
+                        <a:t>DevOps evidence → team-owned change request</a:t>
                       </a:r>
                     </a:p>
                   </a:txBody>
@@ -32495,7 +31956,7 @@
               </a:defRPr>
             </a:pPr>
             <a:r>
-              <a:t>Official source IDs: D34, K06, S08, F03</a:t>
+              <a:t>Official source IDs: D34, S08, F03</a:t>
             </a:r>
           </a:p>
         </p:txBody>
@@ -32523,7 +31984,7 @@
                 <a:gridCol w="3727704"/>
                 <a:gridCol w="3727704"/>
               </a:tblGrid>
-              <a:tr h="771753">
+              <a:tr h="964692">
                 <a:tc>
                   <a:txBody>
                     <a:bodyPr/>
@@ -32606,7 +32067,7 @@
                   </a:tcPr>
                 </a:tc>
               </a:tr>
-              <a:tr h="771753">
+              <a:tr h="964692">
                 <a:tc>
                   <a:txBody>
                     <a:bodyPr/>
@@ -32689,7 +32150,7 @@
                   </a:tcPr>
                 </a:tc>
               </a:tr>
-              <a:tr h="771753">
+              <a:tr h="964692">
                 <a:tc>
                   <a:txBody>
                     <a:bodyPr/>
@@ -32707,7 +32168,7 @@
                         </a:defRPr>
                       </a:pPr>
                       <a:r>
-                        <a:t>Kiro</a:t>
+                        <a:t>Security</a:t>
                       </a:r>
                     </a:p>
                   </a:txBody>
@@ -32734,7 +32195,7 @@
                         </a:defRPr>
                       </a:pPr>
                       <a:r>
-                        <a:t>Repository authorization and client/sandbox controls</a:t>
+                        <a:t>Target, credentials and network scope</a:t>
                       </a:r>
                     </a:p>
                   </a:txBody>
@@ -32761,7 +32222,7 @@
                         </a:defRPr>
                       </a:pPr>
                       <a:r>
-                        <a:t>Only selected repository/task access</a:t>
+                        <a:t>Only authorized test systems reachable</a:t>
                       </a:r>
                     </a:p>
                   </a:txBody>
@@ -32772,7 +32233,7 @@
                   </a:tcPr>
                 </a:tc>
               </a:tr>
-              <a:tr h="771753">
+              <a:tr h="964692">
                 <a:tc>
                   <a:txBody>
                     <a:bodyPr/>
@@ -32790,7 +32251,7 @@
                         </a:defRPr>
                       </a:pPr>
                       <a:r>
-                        <a:t>Security</a:t>
+                        <a:t>FinOps</a:t>
                       </a:r>
                     </a:p>
                   </a:txBody>
@@ -32817,7 +32278,7 @@
                         </a:defRPr>
                       </a:pPr>
                       <a:r>
-                        <a:t>Target, credentials and network scope</a:t>
+                        <a:t>Per-agent roles, context and connections</a:t>
                       </a:r>
                     </a:p>
                   </a:txBody>
@@ -32844,96 +32305,13 @@
                         </a:defRPr>
                       </a:pPr>
                       <a:r>
-                        <a:t>Only authorized test systems reachable</a:t>
+                        <a:t>Cost scope and destination access match ownership</a:t>
                       </a:r>
                     </a:p>
                   </a:txBody>
                   <a:tcPr marL="128016" marR="128016" marT="82296" marB="54864">
                     <a:solidFill>
                       <a:srgbClr val="F1F5F8"/>
-                    </a:solidFill>
-                  </a:tcPr>
-                </a:tc>
-              </a:tr>
-              <a:tr h="771756">
-                <a:tc>
-                  <a:txBody>
-                    <a:bodyPr/>
-                    <a:lstStyle/>
-                    <a:p>
-                      <a:pPr>
-                        <a:spcAft>
-                          <a:spcPts val="0"/>
-                        </a:spcAft>
-                        <a:defRPr sz="1600" b="0">
-                          <a:solidFill>
-                            <a:srgbClr val="182B43"/>
-                          </a:solidFill>
-                          <a:latin typeface="Arial"/>
-                        </a:defRPr>
-                      </a:pPr>
-                      <a:r>
-                        <a:t>FinOps</a:t>
-                      </a:r>
-                    </a:p>
-                  </a:txBody>
-                  <a:tcPr marL="128016" marR="128016" marT="82296" marB="54864">
-                    <a:solidFill>
-                      <a:srgbClr val="FFFFFF"/>
-                    </a:solidFill>
-                  </a:tcPr>
-                </a:tc>
-                <a:tc>
-                  <a:txBody>
-                    <a:bodyPr/>
-                    <a:lstStyle/>
-                    <a:p>
-                      <a:pPr>
-                        <a:spcAft>
-                          <a:spcPts val="0"/>
-                        </a:spcAft>
-                        <a:defRPr sz="1600" b="0">
-                          <a:solidFill>
-                            <a:srgbClr val="182B43"/>
-                          </a:solidFill>
-                          <a:latin typeface="Arial"/>
-                        </a:defRPr>
-                      </a:pPr>
-                      <a:r>
-                        <a:t>Per-agent roles, context and connections</a:t>
-                      </a:r>
-                    </a:p>
-                  </a:txBody>
-                  <a:tcPr marL="128016" marR="128016" marT="82296" marB="54864">
-                    <a:solidFill>
-                      <a:srgbClr val="FFFFFF"/>
-                    </a:solidFill>
-                  </a:tcPr>
-                </a:tc>
-                <a:tc>
-                  <a:txBody>
-                    <a:bodyPr/>
-                    <a:lstStyle/>
-                    <a:p>
-                      <a:pPr>
-                        <a:spcAft>
-                          <a:spcPts val="0"/>
-                        </a:spcAft>
-                        <a:defRPr sz="1600" b="0">
-                          <a:solidFill>
-                            <a:srgbClr val="182B43"/>
-                          </a:solidFill>
-                          <a:latin typeface="Arial"/>
-                        </a:defRPr>
-                      </a:pPr>
-                      <a:r>
-                        <a:t>Cost scope and destination access match ownership</a:t>
-                      </a:r>
-                    </a:p>
-                  </a:txBody>
-                  <a:tcPr marL="128016" marR="128016" marT="82296" marB="54864">
-                    <a:solidFill>
-                      <a:srgbClr val="FFFFFF"/>
                     </a:solidFill>
                   </a:tcPr>
                 </a:tc>
@@ -33301,7 +32679,7 @@
               </a:defRPr>
             </a:pPr>
             <a:r>
-              <a:t>Official source IDs: D03, K03, S12, F06</a:t>
+              <a:t>Official source IDs: D03, S12, F06</a:t>
             </a:r>
           </a:p>
         </p:txBody>
@@ -33315,7 +32693,7 @@
         <p:spPr>
           <a:xfrm>
             <a:off x="502920" y="2313432"/>
-            <a:ext cx="5490972" cy="1837944"/>
+            <a:ext cx="3593592" cy="3877056"/>
           </a:xfrm>
           <a:prstGeom prst="roundRect">
             <a:avLst>
@@ -33362,7 +32740,7 @@
         <p:spPr>
           <a:xfrm>
             <a:off x="667512" y="2459736"/>
-            <a:ext cx="5161788" cy="201168"/>
+            <a:ext cx="3264408" cy="201168"/>
           </a:xfrm>
           <a:prstGeom prst="rect">
             <a:avLst/>
@@ -33404,7 +32782,7 @@
         <p:spPr>
           <a:xfrm>
             <a:off x="667512" y="2788920"/>
-            <a:ext cx="5161788" cy="502920"/>
+            <a:ext cx="3264408" cy="502920"/>
           </a:xfrm>
           <a:prstGeom prst="rect">
             <a:avLst/>
@@ -33446,27 +32824,27 @@
         <p:spPr>
           <a:xfrm>
             <a:off x="667512" y="3392424"/>
-            <a:ext cx="5161788" cy="612648"/>
-          </a:xfrm>
-          <a:prstGeom prst="rect">
-            <a:avLst/>
-          </a:prstGeom>
-          <a:noFill/>
-        </p:spPr>
-        <p:txBody>
-          <a:bodyPr wrap="square" lIns="0" rIns="0" tIns="0" bIns="0" anchor="t">
-            <a:spAutoFit/>
-          </a:bodyPr>
-          <a:lstStyle/>
-          <a:p>
-            <a:pPr>
-              <a:lnSpc>
-                <a:spcPct val="112000"/>
-              </a:lnSpc>
-              <a:spcAft>
-                <a:spcPts val="300"/>
-              </a:spcAft>
-              <a:defRPr sz="1600" b="0">
+            <a:ext cx="3264408" cy="2651760"/>
+          </a:xfrm>
+          <a:prstGeom prst="rect">
+            <a:avLst/>
+          </a:prstGeom>
+          <a:noFill/>
+        </p:spPr>
+        <p:txBody>
+          <a:bodyPr wrap="square" lIns="0" rIns="0" tIns="0" bIns="0" anchor="t">
+            <a:spAutoFit/>
+          </a:bodyPr>
+          <a:lstStyle/>
+          <a:p>
+            <a:pPr>
+              <a:lnSpc>
+                <a:spcPct val="112000"/>
+              </a:lnSpc>
+              <a:spcAft>
+                <a:spcPts val="300"/>
+              </a:spcAft>
+              <a:defRPr sz="1800" b="0">
                 <a:solidFill>
                   <a:srgbClr val="182B43"/>
                 </a:solidFill>
@@ -33487,8 +32865,8 @@
         </p:nvSpPr>
         <p:spPr>
           <a:xfrm>
-            <a:off x="6195059" y="2313432"/>
-            <a:ext cx="5490972" cy="1837944"/>
+            <a:off x="4297680" y="2313432"/>
+            <a:ext cx="3593592" cy="3877056"/>
           </a:xfrm>
           <a:prstGeom prst="roundRect">
             <a:avLst>
@@ -33534,8 +32912,8 @@
         </p:nvSpPr>
         <p:spPr>
           <a:xfrm>
-            <a:off x="6359651" y="2459736"/>
-            <a:ext cx="5161788" cy="201168"/>
+            <a:off x="4462272" y="2459736"/>
+            <a:ext cx="3264408" cy="201168"/>
           </a:xfrm>
           <a:prstGeom prst="rect">
             <a:avLst/>
@@ -33563,7 +32941,7 @@
               </a:defRPr>
             </a:pPr>
             <a:r>
-              <a:t>KIRO</a:t>
+              <a:t>SECURITY</a:t>
             </a:r>
           </a:p>
         </p:txBody>
@@ -33576,8 +32954,8 @@
         </p:nvSpPr>
         <p:spPr>
           <a:xfrm>
-            <a:off x="6359651" y="2788920"/>
-            <a:ext cx="5161788" cy="502920"/>
+            <a:off x="4462272" y="2788920"/>
+            <a:ext cx="3264408" cy="502920"/>
           </a:xfrm>
           <a:prstGeom prst="rect">
             <a:avLst/>
@@ -33605,7 +32983,7 @@
               </a:defRPr>
             </a:pPr>
             <a:r>
-              <a:t>Repository</a:t>
+              <a:t>Assessment</a:t>
             </a:r>
           </a:p>
         </p:txBody>
@@ -33618,28 +32996,28 @@
         </p:nvSpPr>
         <p:spPr>
           <a:xfrm>
-            <a:off x="6359651" y="3392424"/>
-            <a:ext cx="5161788" cy="612648"/>
-          </a:xfrm>
-          <a:prstGeom prst="rect">
-            <a:avLst/>
-          </a:prstGeom>
-          <a:noFill/>
-        </p:spPr>
-        <p:txBody>
-          <a:bodyPr wrap="square" lIns="0" rIns="0" tIns="0" bIns="0" anchor="t">
-            <a:spAutoFit/>
-          </a:bodyPr>
-          <a:lstStyle/>
-          <a:p>
-            <a:pPr>
-              <a:lnSpc>
-                <a:spcPct val="112000"/>
-              </a:lnSpc>
-              <a:spcAft>
-                <a:spcPts val="300"/>
-              </a:spcAft>
-              <a:defRPr sz="1600" b="0">
+            <a:off x="4462272" y="3392424"/>
+            <a:ext cx="3264408" cy="2651760"/>
+          </a:xfrm>
+          <a:prstGeom prst="rect">
+            <a:avLst/>
+          </a:prstGeom>
+          <a:noFill/>
+        </p:spPr>
+        <p:txBody>
+          <a:bodyPr wrap="square" lIns="0" rIns="0" tIns="0" bIns="0" anchor="t">
+            <a:spAutoFit/>
+          </a:bodyPr>
+          <a:lstStyle/>
+          <a:p>
+            <a:pPr>
+              <a:lnSpc>
+                <a:spcPct val="112000"/>
+              </a:lnSpc>
+              <a:spcAft>
+                <a:spcPts val="300"/>
+              </a:spcAft>
+              <a:defRPr sz="1800" b="0">
                 <a:solidFill>
                   <a:srgbClr val="182B43"/>
                 </a:solidFill>
@@ -33647,7 +33025,7 @@
               </a:defRPr>
             </a:pPr>
             <a:r>
-              <a:t>Commit, file/symbol, requirement and check result.</a:t>
+              <a:t>Target version, identity, coverage, finding and run ID.</a:t>
             </a:r>
           </a:p>
         </p:txBody>
@@ -33660,8 +33038,8 @@
         </p:nvSpPr>
         <p:spPr>
           <a:xfrm>
-            <a:off x="502920" y="4352544"/>
-            <a:ext cx="5490972" cy="1837944"/>
+            <a:off x="8092440" y="2313432"/>
+            <a:ext cx="3593592" cy="3877056"/>
           </a:xfrm>
           <a:prstGeom prst="roundRect">
             <a:avLst>
@@ -33707,8 +33085,8 @@
         </p:nvSpPr>
         <p:spPr>
           <a:xfrm>
-            <a:off x="667512" y="4498848"/>
-            <a:ext cx="5161788" cy="201168"/>
+            <a:off x="8257032" y="2459736"/>
+            <a:ext cx="3264408" cy="201168"/>
           </a:xfrm>
           <a:prstGeom prst="rect">
             <a:avLst/>
@@ -33736,7 +33114,7 @@
               </a:defRPr>
             </a:pPr>
             <a:r>
-              <a:t>SECURITY</a:t>
+              <a:t>FINOPS</a:t>
             </a:r>
           </a:p>
         </p:txBody>
@@ -33749,8 +33127,8 @@
         </p:nvSpPr>
         <p:spPr>
           <a:xfrm>
-            <a:off x="667512" y="4828031"/>
-            <a:ext cx="5161788" cy="502920"/>
+            <a:off x="8257032" y="2788920"/>
+            <a:ext cx="3264408" cy="502920"/>
           </a:xfrm>
           <a:prstGeom prst="rect">
             <a:avLst/>
@@ -33778,7 +33156,7 @@
               </a:defRPr>
             </a:pPr>
             <a:r>
-              <a:t>Assessment</a:t>
+              <a:t>Cost</a:t>
             </a:r>
           </a:p>
         </p:txBody>
@@ -33791,201 +33169,28 @@
         </p:nvSpPr>
         <p:spPr>
           <a:xfrm>
-            <a:off x="667512" y="5431536"/>
-            <a:ext cx="5161788" cy="612648"/>
-          </a:xfrm>
-          <a:prstGeom prst="rect">
-            <a:avLst/>
-          </a:prstGeom>
-          <a:noFill/>
-        </p:spPr>
-        <p:txBody>
-          <a:bodyPr wrap="square" lIns="0" rIns="0" tIns="0" bIns="0" anchor="t">
-            <a:spAutoFit/>
-          </a:bodyPr>
-          <a:lstStyle/>
-          <a:p>
-            <a:pPr>
-              <a:lnSpc>
-                <a:spcPct val="112000"/>
-              </a:lnSpc>
-              <a:spcAft>
-                <a:spcPts val="300"/>
-              </a:spcAft>
-              <a:defRPr sz="1600" b="0">
-                <a:solidFill>
-                  <a:srgbClr val="182B43"/>
-                </a:solidFill>
-                <a:latin typeface="Arial"/>
-              </a:defRPr>
-            </a:pPr>
-            <a:r>
-              <a:t>Target version, identity, coverage, finding and run ID.</a:t>
-            </a:r>
-          </a:p>
-        </p:txBody>
-      </p:sp>
-      <p:sp>
-        <p:nvSpPr>
-          <p:cNvPr id="22" name="Rounded Rectangle 21"/>
-          <p:cNvSpPr/>
-          <p:nvPr/>
-        </p:nvSpPr>
-        <p:spPr>
-          <a:xfrm>
-            <a:off x="6195059" y="4352544"/>
-            <a:ext cx="5490972" cy="1837944"/>
-          </a:xfrm>
-          <a:prstGeom prst="roundRect">
-            <a:avLst>
-              <a:gd name="adj" fmla="val 8000"/>
-            </a:avLst>
-          </a:prstGeom>
-          <a:solidFill>
-            <a:srgbClr val="F1F5F8"/>
-          </a:solidFill>
-          <a:ln w="10160">
-            <a:solidFill>
-              <a:srgbClr val="DBE2E9"/>
-            </a:solidFill>
-          </a:ln>
-        </p:spPr>
-        <p:style>
-          <a:lnRef idx="1">
-            <a:schemeClr val="accent1"/>
-          </a:lnRef>
-          <a:fillRef idx="3">
-            <a:schemeClr val="accent1"/>
-          </a:fillRef>
-          <a:effectRef idx="2">
-            <a:schemeClr val="accent1"/>
-          </a:effectRef>
-          <a:fontRef idx="minor">
-            <a:schemeClr val="lt1"/>
-          </a:fontRef>
-        </p:style>
-        <p:txBody>
-          <a:bodyPr rtlCol="0" anchor="ctr"/>
-          <a:lstStyle/>
-          <a:p>
-            <a:pPr algn="ctr"/>
-          </a:p>
-        </p:txBody>
-      </p:sp>
-      <p:sp>
-        <p:nvSpPr>
-          <p:cNvPr id="23" name="TextBox 22"/>
-          <p:cNvSpPr txBox="1"/>
-          <p:nvPr/>
-        </p:nvSpPr>
-        <p:spPr>
-          <a:xfrm>
-            <a:off x="6359651" y="4498848"/>
-            <a:ext cx="5161788" cy="201168"/>
-          </a:xfrm>
-          <a:prstGeom prst="rect">
-            <a:avLst/>
-          </a:prstGeom>
-          <a:noFill/>
-        </p:spPr>
-        <p:txBody>
-          <a:bodyPr wrap="square" lIns="0" rIns="0" tIns="0" bIns="0" anchor="t">
-            <a:spAutoFit/>
-          </a:bodyPr>
-          <a:lstStyle/>
-          <a:p>
-            <a:pPr>
-              <a:lnSpc>
-                <a:spcPct val="112000"/>
-              </a:lnSpc>
-              <a:spcAft>
-                <a:spcPts val="300"/>
-              </a:spcAft>
-              <a:defRPr sz="1050" b="1">
-                <a:solidFill>
-                  <a:srgbClr val="285D9C"/>
-                </a:solidFill>
-                <a:latin typeface="Arial"/>
-              </a:defRPr>
-            </a:pPr>
-            <a:r>
-              <a:t>FINOPS</a:t>
-            </a:r>
-          </a:p>
-        </p:txBody>
-      </p:sp>
-      <p:sp>
-        <p:nvSpPr>
-          <p:cNvPr id="24" name="TextBox 23"/>
-          <p:cNvSpPr txBox="1"/>
-          <p:nvPr/>
-        </p:nvSpPr>
-        <p:spPr>
-          <a:xfrm>
-            <a:off x="6359651" y="4828031"/>
-            <a:ext cx="5161788" cy="502920"/>
-          </a:xfrm>
-          <a:prstGeom prst="rect">
-            <a:avLst/>
-          </a:prstGeom>
-          <a:noFill/>
-        </p:spPr>
-        <p:txBody>
-          <a:bodyPr wrap="square" lIns="0" rIns="0" tIns="0" bIns="0" anchor="t">
-            <a:spAutoFit/>
-          </a:bodyPr>
-          <a:lstStyle/>
-          <a:p>
-            <a:pPr>
-              <a:lnSpc>
-                <a:spcPct val="112000"/>
-              </a:lnSpc>
-              <a:spcAft>
-                <a:spcPts val="300"/>
-              </a:spcAft>
-              <a:defRPr sz="2000" b="1">
-                <a:solidFill>
-                  <a:srgbClr val="182B43"/>
-                </a:solidFill>
-                <a:latin typeface="Arial"/>
-              </a:defRPr>
-            </a:pPr>
-            <a:r>
-              <a:t>Cost</a:t>
-            </a:r>
-          </a:p>
-        </p:txBody>
-      </p:sp>
-      <p:sp>
-        <p:nvSpPr>
-          <p:cNvPr id="25" name="TextBox 24"/>
-          <p:cNvSpPr txBox="1"/>
-          <p:nvPr/>
-        </p:nvSpPr>
-        <p:spPr>
-          <a:xfrm>
-            <a:off x="6359651" y="5431536"/>
-            <a:ext cx="5161788" cy="612648"/>
-          </a:xfrm>
-          <a:prstGeom prst="rect">
-            <a:avLst/>
-          </a:prstGeom>
-          <a:noFill/>
-        </p:spPr>
-        <p:txBody>
-          <a:bodyPr wrap="square" lIns="0" rIns="0" tIns="0" bIns="0" anchor="t">
-            <a:spAutoFit/>
-          </a:bodyPr>
-          <a:lstStyle/>
-          <a:p>
-            <a:pPr>
-              <a:lnSpc>
-                <a:spcPct val="112000"/>
-              </a:lnSpc>
-              <a:spcAft>
-                <a:spcPts val="300"/>
-              </a:spcAft>
-              <a:defRPr sz="1600" b="0">
+            <a:off x="8257032" y="3392424"/>
+            <a:ext cx="3264408" cy="2651760"/>
+          </a:xfrm>
+          <a:prstGeom prst="rect">
+            <a:avLst/>
+          </a:prstGeom>
+          <a:noFill/>
+        </p:spPr>
+        <p:txBody>
+          <a:bodyPr wrap="square" lIns="0" rIns="0" tIns="0" bIns="0" anchor="t">
+            <a:spAutoFit/>
+          </a:bodyPr>
+          <a:lstStyle/>
+          <a:p>
+            <a:pPr>
+              <a:lnSpc>
+                <a:spcPct val="112000"/>
+              </a:lnSpc>
+              <a:spcAft>
+                <a:spcPts val="300"/>
+              </a:spcAft>
+              <a:defRPr sz="1800" b="0">
                 <a:solidFill>
                   <a:srgbClr val="182B43"/>
                 </a:solidFill>
@@ -34357,7 +33562,7 @@
               </a:defRPr>
             </a:pPr>
             <a:r>
-              <a:t>Official source IDs: K13, K14, D06, F12</a:t>
+              <a:t>Official source IDs: D06, F12</a:t>
             </a:r>
           </a:p>
         </p:txBody>
@@ -34530,7 +33735,7 @@
               </a:defRPr>
             </a:pPr>
             <a:r>
-              <a:t>Prompts, steering, skills, memory and context explain the task and preferred procedure.</a:t>
+              <a:t>Prompts, instructions, skills, memory and context explain the task and preferred procedure.</a:t>
             </a:r>
           </a:p>
         </p:txBody>
@@ -35154,7 +34359,7 @@
               </a:defRPr>
             </a:pPr>
             <a:r>
-              <a:t>Official source IDs: D13, D11, K02, F15</a:t>
+              <a:t>Official source IDs: D13, D11, F15</a:t>
             </a:r>
           </a:p>
         </p:txBody>
@@ -35182,7 +34387,7 @@
                 <a:gridCol w="3727704"/>
                 <a:gridCol w="3727704"/>
               </a:tblGrid>
-              <a:tr h="771753">
+              <a:tr h="964692">
                 <a:tc>
                   <a:txBody>
                     <a:bodyPr/>
@@ -35265,7 +34470,7 @@
                   </a:tcPr>
                 </a:tc>
               </a:tr>
-              <a:tr h="771753">
+              <a:tr h="964692">
                 <a:tc>
                   <a:txBody>
                     <a:bodyPr/>
@@ -35348,7 +34553,7 @@
                   </a:tcPr>
                 </a:tc>
               </a:tr>
-              <a:tr h="771753">
+              <a:tr h="964692">
                 <a:tc>
                   <a:txBody>
                     <a:bodyPr/>
@@ -35431,7 +34636,7 @@
                   </a:tcPr>
                 </a:tc>
               </a:tr>
-              <a:tr h="771753">
+              <a:tr h="964692">
                 <a:tc>
                   <a:txBody>
                     <a:bodyPr/>
@@ -35449,7 +34654,7 @@
                         </a:defRPr>
                       </a:pPr>
                       <a:r>
-                        <a:t>Kiro code change</a:t>
+                        <a:t>FinOps external post</a:t>
                       </a:r>
                     </a:p>
                   </a:txBody>
@@ -35476,7 +34681,7 @@
                         </a:defRPr>
                       </a:pPr>
                       <a:r>
-                        <a:t>Reviewable repository output; no automatic merge</a:t>
+                        <a:t>Jira and Slack approval differ by trigger</a:t>
                       </a:r>
                     </a:p>
                   </a:txBody>
@@ -35503,96 +34708,13 @@
                         </a:defRPr>
                       </a:pPr>
                       <a:r>
-                        <a:t>Repository checks and merge ownership</a:t>
+                        <a:t>Review destination scope and pre-authorization</a:t>
                       </a:r>
                     </a:p>
                   </a:txBody>
                   <a:tcPr marL="128016" marR="128016" marT="82296" marB="54864">
                     <a:solidFill>
                       <a:srgbClr val="F1F5F8"/>
-                    </a:solidFill>
-                  </a:tcPr>
-                </a:tc>
-              </a:tr>
-              <a:tr h="771756">
-                <a:tc>
-                  <a:txBody>
-                    <a:bodyPr/>
-                    <a:lstStyle/>
-                    <a:p>
-                      <a:pPr>
-                        <a:spcAft>
-                          <a:spcPts val="0"/>
-                        </a:spcAft>
-                        <a:defRPr sz="1600" b="0">
-                          <a:solidFill>
-                            <a:srgbClr val="182B43"/>
-                          </a:solidFill>
-                          <a:latin typeface="Arial"/>
-                        </a:defRPr>
-                      </a:pPr>
-                      <a:r>
-                        <a:t>FinOps external post</a:t>
-                      </a:r>
-                    </a:p>
-                  </a:txBody>
-                  <a:tcPr marL="128016" marR="128016" marT="82296" marB="54864">
-                    <a:solidFill>
-                      <a:srgbClr val="FFFFFF"/>
-                    </a:solidFill>
-                  </a:tcPr>
-                </a:tc>
-                <a:tc>
-                  <a:txBody>
-                    <a:bodyPr/>
-                    <a:lstStyle/>
-                    <a:p>
-                      <a:pPr>
-                        <a:spcAft>
-                          <a:spcPts val="0"/>
-                        </a:spcAft>
-                        <a:defRPr sz="1600" b="0">
-                          <a:solidFill>
-                            <a:srgbClr val="182B43"/>
-                          </a:solidFill>
-                          <a:latin typeface="Arial"/>
-                        </a:defRPr>
-                      </a:pPr>
-                      <a:r>
-                        <a:t>Jira and Slack approval differ by trigger</a:t>
-                      </a:r>
-                    </a:p>
-                  </a:txBody>
-                  <a:tcPr marL="128016" marR="128016" marT="82296" marB="54864">
-                    <a:solidFill>
-                      <a:srgbClr val="FFFFFF"/>
-                    </a:solidFill>
-                  </a:tcPr>
-                </a:tc>
-                <a:tc>
-                  <a:txBody>
-                    <a:bodyPr/>
-                    <a:lstStyle/>
-                    <a:p>
-                      <a:pPr>
-                        <a:spcAft>
-                          <a:spcPts val="0"/>
-                        </a:spcAft>
-                        <a:defRPr sz="1600" b="0">
-                          <a:solidFill>
-                            <a:srgbClr val="182B43"/>
-                          </a:solidFill>
-                          <a:latin typeface="Arial"/>
-                        </a:defRPr>
-                      </a:pPr>
-                      <a:r>
-                        <a:t>Review destination scope and pre-authorization</a:t>
-                      </a:r>
-                    </a:p>
-                  </a:txBody>
-                  <a:tcPr marL="128016" marR="128016" marT="82296" marB="54864">
-                    <a:solidFill>
-                      <a:srgbClr val="FFFFFF"/>
                     </a:solidFill>
                   </a:tcPr>
                 </a:tc>
@@ -35960,7 +35082,7 @@
               </a:defRPr>
             </a:pPr>
             <a:r>
-              <a:t>Official source IDs: K10, K19, K20, D11, S10</a:t>
+              <a:t>Official source IDs: D11, S10</a:t>
             </a:r>
           </a:p>
         </p:txBody>
